--- a/documentation/NRCan_openFOAM_workflow_23-Jun-2026.pptx
+++ b/documentation/NRCan_openFOAM_workflow_23-Jun-2026.pptx
@@ -104,7 +104,97 @@
       </a:defRPr>
     </a:lvl9pPr>
   </p:defaultTextStyle>
+  <p:extLst>
+    <p:ext uri="{EFAFB233-063F-42B5-8137-9DF3F51BA10A}">
+      <p15:sldGuideLst xmlns:p15="http://schemas.microsoft.com/office/powerpoint/2012/main"/>
+    </p:ext>
+  </p:extLst>
 </p:presentation>
+</file>
+
+<file path=ppt/changesInfos/changesInfo1.xml><?xml version="1.0" encoding="utf-8"?>
+<pc:chgInfo xmlns:a="http://schemas.openxmlformats.org/drawingml/2006/main" xmlns:r="http://schemas.openxmlformats.org/officeDocument/2006/relationships" xmlns:ac="http://schemas.microsoft.com/office/drawing/2013/main/command" xmlns:pc="http://schemas.microsoft.com/office/powerpoint/2013/main/command">
+  <pc:docChgLst>
+    <pc:chgData name="Vorster, Ryan" userId="bb32ba2a-4194-4e4a-a0a4-8b9eed9a2b2e" providerId="ADAL" clId="{79C371B0-B8D9-4364-B6B5-D4F268AB2032}"/>
+    <pc:docChg chg="custSel modSld">
+      <pc:chgData name="Vorster, Ryan" userId="bb32ba2a-4194-4e4a-a0a4-8b9eed9a2b2e" providerId="ADAL" clId="{79C371B0-B8D9-4364-B6B5-D4F268AB2032}" dt="2026-06-30T03:48:16.566" v="56" actId="478"/>
+      <pc:docMkLst>
+        <pc:docMk/>
+      </pc:docMkLst>
+      <pc:sldChg chg="delSp modSp mod">
+        <pc:chgData name="Vorster, Ryan" userId="bb32ba2a-4194-4e4a-a0a4-8b9eed9a2b2e" providerId="ADAL" clId="{79C371B0-B8D9-4364-B6B5-D4F268AB2032}" dt="2026-06-30T03:48:16.566" v="56" actId="478"/>
+        <pc:sldMkLst>
+          <pc:docMk/>
+          <pc:sldMk cId="3829633059" sldId="256"/>
+        </pc:sldMkLst>
+        <pc:spChg chg="mod">
+          <ac:chgData name="Vorster, Ryan" userId="bb32ba2a-4194-4e4a-a0a4-8b9eed9a2b2e" providerId="ADAL" clId="{79C371B0-B8D9-4364-B6B5-D4F268AB2032}" dt="2026-06-30T03:44:13.766" v="29" actId="20577"/>
+          <ac:spMkLst>
+            <pc:docMk/>
+            <pc:sldMk cId="3829633059" sldId="256"/>
+            <ac:spMk id="4" creationId="{31C6E29F-FE7F-AA5E-D29C-175ABB558DC6}"/>
+          </ac:spMkLst>
+        </pc:spChg>
+        <pc:spChg chg="mod">
+          <ac:chgData name="Vorster, Ryan" userId="bb32ba2a-4194-4e4a-a0a4-8b9eed9a2b2e" providerId="ADAL" clId="{79C371B0-B8D9-4364-B6B5-D4F268AB2032}" dt="2026-06-30T03:44:08.540" v="21" actId="20577"/>
+          <ac:spMkLst>
+            <pc:docMk/>
+            <pc:sldMk cId="3829633059" sldId="256"/>
+            <ac:spMk id="13" creationId="{334E8AFB-D357-37E2-90B4-54F09E832E24}"/>
+          </ac:spMkLst>
+        </pc:spChg>
+        <pc:spChg chg="mod">
+          <ac:chgData name="Vorster, Ryan" userId="bb32ba2a-4194-4e4a-a0a4-8b9eed9a2b2e" providerId="ADAL" clId="{79C371B0-B8D9-4364-B6B5-D4F268AB2032}" dt="2026-06-30T03:44:35.655" v="51" actId="20577"/>
+          <ac:spMkLst>
+            <pc:docMk/>
+            <pc:sldMk cId="3829633059" sldId="256"/>
+            <ac:spMk id="14" creationId="{E5D7CB58-83B0-20B7-8001-F0390C6DBA04}"/>
+          </ac:spMkLst>
+        </pc:spChg>
+        <pc:spChg chg="del">
+          <ac:chgData name="Vorster, Ryan" userId="bb32ba2a-4194-4e4a-a0a4-8b9eed9a2b2e" providerId="ADAL" clId="{79C371B0-B8D9-4364-B6B5-D4F268AB2032}" dt="2026-06-30T03:45:14.558" v="55" actId="478"/>
+          <ac:spMkLst>
+            <pc:docMk/>
+            <pc:sldMk cId="3829633059" sldId="256"/>
+            <ac:spMk id="57" creationId="{BE7A889B-77C2-D180-561C-0402F2C6006E}"/>
+          </ac:spMkLst>
+        </pc:spChg>
+        <pc:spChg chg="del">
+          <ac:chgData name="Vorster, Ryan" userId="bb32ba2a-4194-4e4a-a0a4-8b9eed9a2b2e" providerId="ADAL" clId="{79C371B0-B8D9-4364-B6B5-D4F268AB2032}" dt="2026-06-30T03:45:11.817" v="54" actId="478"/>
+          <ac:spMkLst>
+            <pc:docMk/>
+            <pc:sldMk cId="3829633059" sldId="256"/>
+            <ac:spMk id="87" creationId="{198BB0C7-B01F-4587-2862-F2936F34C8BE}"/>
+          </ac:spMkLst>
+        </pc:spChg>
+        <pc:spChg chg="del">
+          <ac:chgData name="Vorster, Ryan" userId="bb32ba2a-4194-4e4a-a0a4-8b9eed9a2b2e" providerId="ADAL" clId="{79C371B0-B8D9-4364-B6B5-D4F268AB2032}" dt="2026-06-30T03:45:08.900" v="53" actId="478"/>
+          <ac:spMkLst>
+            <pc:docMk/>
+            <pc:sldMk cId="3829633059" sldId="256"/>
+            <ac:spMk id="99" creationId="{203DB347-2EB9-3A7B-D375-860EEDB62E2F}"/>
+          </ac:spMkLst>
+        </pc:spChg>
+        <pc:spChg chg="del">
+          <ac:chgData name="Vorster, Ryan" userId="bb32ba2a-4194-4e4a-a0a4-8b9eed9a2b2e" providerId="ADAL" clId="{79C371B0-B8D9-4364-B6B5-D4F268AB2032}" dt="2026-06-30T03:45:06.855" v="52" actId="478"/>
+          <ac:spMkLst>
+            <pc:docMk/>
+            <pc:sldMk cId="3829633059" sldId="256"/>
+            <ac:spMk id="100" creationId="{8B20C21D-B3E6-BF14-0408-739109595E0E}"/>
+          </ac:spMkLst>
+        </pc:spChg>
+        <pc:spChg chg="del">
+          <ac:chgData name="Vorster, Ryan" userId="bb32ba2a-4194-4e4a-a0a4-8b9eed9a2b2e" providerId="ADAL" clId="{79C371B0-B8D9-4364-B6B5-D4F268AB2032}" dt="2026-06-30T03:48:16.566" v="56" actId="478"/>
+          <ac:spMkLst>
+            <pc:docMk/>
+            <pc:sldMk cId="3829633059" sldId="256"/>
+            <ac:spMk id="103" creationId="{25D72024-884B-39BE-10EE-26EA60ED312F}"/>
+          </ac:spMkLst>
+        </pc:spChg>
+      </pc:sldChg>
+    </pc:docChg>
+  </pc:docChgLst>
+</pc:chgInfo>
 </file>
 
 <file path=ppt/diagrams/colors1.xml><?xml version="1.0" encoding="utf-8"?>
@@ -4092,7 +4182,7 @@
           <a:p>
             <a:fld id="{C36A0A36-3FD0-4211-935F-7D39A802380A}" type="datetimeFigureOut">
               <a:rPr lang="en-CA" smtClean="0"/>
-              <a:t>2026-06-23</a:t>
+              <a:t>2026-06-29</a:t>
             </a:fld>
             <a:endParaRPr lang="en-CA"/>
           </a:p>
@@ -4292,7 +4382,7 @@
           <a:p>
             <a:fld id="{C36A0A36-3FD0-4211-935F-7D39A802380A}" type="datetimeFigureOut">
               <a:rPr lang="en-CA" smtClean="0"/>
-              <a:t>2026-06-23</a:t>
+              <a:t>2026-06-29</a:t>
             </a:fld>
             <a:endParaRPr lang="en-CA"/>
           </a:p>
@@ -4502,7 +4592,7 @@
           <a:p>
             <a:fld id="{C36A0A36-3FD0-4211-935F-7D39A802380A}" type="datetimeFigureOut">
               <a:rPr lang="en-CA" smtClean="0"/>
-              <a:t>2026-06-23</a:t>
+              <a:t>2026-06-29</a:t>
             </a:fld>
             <a:endParaRPr lang="en-CA"/>
           </a:p>
@@ -4702,7 +4792,7 @@
           <a:p>
             <a:fld id="{C36A0A36-3FD0-4211-935F-7D39A802380A}" type="datetimeFigureOut">
               <a:rPr lang="en-CA" smtClean="0"/>
-              <a:t>2026-06-23</a:t>
+              <a:t>2026-06-29</a:t>
             </a:fld>
             <a:endParaRPr lang="en-CA"/>
           </a:p>
@@ -4978,7 +5068,7 @@
           <a:p>
             <a:fld id="{C36A0A36-3FD0-4211-935F-7D39A802380A}" type="datetimeFigureOut">
               <a:rPr lang="en-CA" smtClean="0"/>
-              <a:t>2026-06-23</a:t>
+              <a:t>2026-06-29</a:t>
             </a:fld>
             <a:endParaRPr lang="en-CA"/>
           </a:p>
@@ -5246,7 +5336,7 @@
           <a:p>
             <a:fld id="{C36A0A36-3FD0-4211-935F-7D39A802380A}" type="datetimeFigureOut">
               <a:rPr lang="en-CA" smtClean="0"/>
-              <a:t>2026-06-23</a:t>
+              <a:t>2026-06-29</a:t>
             </a:fld>
             <a:endParaRPr lang="en-CA"/>
           </a:p>
@@ -5661,7 +5751,7 @@
           <a:p>
             <a:fld id="{C36A0A36-3FD0-4211-935F-7D39A802380A}" type="datetimeFigureOut">
               <a:rPr lang="en-CA" smtClean="0"/>
-              <a:t>2026-06-23</a:t>
+              <a:t>2026-06-29</a:t>
             </a:fld>
             <a:endParaRPr lang="en-CA"/>
           </a:p>
@@ -5803,7 +5893,7 @@
           <a:p>
             <a:fld id="{C36A0A36-3FD0-4211-935F-7D39A802380A}" type="datetimeFigureOut">
               <a:rPr lang="en-CA" smtClean="0"/>
-              <a:t>2026-06-23</a:t>
+              <a:t>2026-06-29</a:t>
             </a:fld>
             <a:endParaRPr lang="en-CA"/>
           </a:p>
@@ -5916,7 +6006,7 @@
           <a:p>
             <a:fld id="{C36A0A36-3FD0-4211-935F-7D39A802380A}" type="datetimeFigureOut">
               <a:rPr lang="en-CA" smtClean="0"/>
-              <a:t>2026-06-23</a:t>
+              <a:t>2026-06-29</a:t>
             </a:fld>
             <a:endParaRPr lang="en-CA"/>
           </a:p>
@@ -6229,7 +6319,7 @@
           <a:p>
             <a:fld id="{C36A0A36-3FD0-4211-935F-7D39A802380A}" type="datetimeFigureOut">
               <a:rPr lang="en-CA" smtClean="0"/>
-              <a:t>2026-06-23</a:t>
+              <a:t>2026-06-29</a:t>
             </a:fld>
             <a:endParaRPr lang="en-CA"/>
           </a:p>
@@ -6518,7 +6608,7 @@
           <a:p>
             <a:fld id="{C36A0A36-3FD0-4211-935F-7D39A802380A}" type="datetimeFigureOut">
               <a:rPr lang="en-CA" smtClean="0"/>
-              <a:t>2026-06-23</a:t>
+              <a:t>2026-06-29</a:t>
             </a:fld>
             <a:endParaRPr lang="en-CA"/>
           </a:p>
@@ -6761,7 +6851,7 @@
           <a:p>
             <a:fld id="{C36A0A36-3FD0-4211-935F-7D39A802380A}" type="datetimeFigureOut">
               <a:rPr lang="en-CA" smtClean="0"/>
-              <a:t>2026-06-23</a:t>
+              <a:t>2026-06-29</a:t>
             </a:fld>
             <a:endParaRPr lang="en-CA"/>
           </a:p>
@@ -7289,8 +7379,12 @@
           <a:lstStyle/>
           <a:p>
             <a:r>
+              <a:rPr lang="en-CA" dirty="0" err="1"/>
+              <a:t>OpenFOAM</a:t>
+            </a:r>
+            <a:r>
               <a:rPr lang="en-CA" dirty="0"/>
-              <a:t>Executor</a:t>
+              <a:t> Modules</a:t>
             </a:r>
           </a:p>
         </p:txBody>
@@ -7366,7 +7460,7 @@
               <a:rPr lang="en-CA" b="1" dirty="0">
                 <a:latin typeface="+mj-lt"/>
               </a:rPr>
-              <a:t>Decision Maker</a:t>
+              <a:t>Executor</a:t>
             </a:r>
           </a:p>
         </p:txBody>
@@ -7466,16 +7560,7 @@
               <a:rPr lang="en-CA" dirty="0">
                 <a:latin typeface="+mj-lt"/>
               </a:rPr>
-              <a:t>Start</a:t>
-            </a:r>
-          </a:p>
-          <a:p>
-            <a:pPr algn="ctr"/>
-            <a:r>
-              <a:rPr lang="en-CA" dirty="0">
-                <a:latin typeface="+mj-lt"/>
-              </a:rPr>
-              <a:t>{Specify base EDF}</a:t>
+              <a:t>Orchestrator</a:t>
             </a:r>
           </a:p>
         </p:txBody>
@@ -7835,45 +7920,6 @@
       </p:cxnSp>
       <p:sp>
         <p:nvSpPr>
-          <p:cNvPr id="57" name="TextBox 56">
-            <a:extLst>
-              <a:ext uri="{FF2B5EF4-FFF2-40B4-BE49-F238E27FC236}">
-                <a16:creationId xmlns:a16="http://schemas.microsoft.com/office/drawing/2014/main" id="{BE7A889B-77C2-D180-561C-0402F2C6006E}"/>
-              </a:ext>
-            </a:extLst>
-          </p:cNvPr>
-          <p:cNvSpPr txBox="1"/>
-          <p:nvPr/>
-        </p:nvSpPr>
-        <p:spPr>
-          <a:xfrm>
-            <a:off x="3209055" y="2424356"/>
-            <a:ext cx="1198179" cy="369332"/>
-          </a:xfrm>
-          <a:prstGeom prst="rect">
-            <a:avLst/>
-          </a:prstGeom>
-          <a:noFill/>
-        </p:spPr>
-        <p:txBody>
-          <a:bodyPr wrap="square" rtlCol="0">
-            <a:spAutoFit/>
-          </a:bodyPr>
-          <a:lstStyle/>
-          <a:p>
-            <a:r>
-              <a:rPr lang="en-CA" dirty="0">
-                <a:solidFill>
-                  <a:schemeClr val="bg1"/>
-                </a:solidFill>
-              </a:rPr>
-              <a:t>Changes</a:t>
-            </a:r>
-          </a:p>
-        </p:txBody>
-      </p:sp>
-      <p:sp>
-        <p:nvSpPr>
           <p:cNvPr id="66" name="Rectangle: Rounded Corners 65">
             <a:extLst>
               <a:ext uri="{FF2B5EF4-FFF2-40B4-BE49-F238E27FC236}">
@@ -7997,41 +8043,6 @@
           </a:fontRef>
         </p:style>
       </p:cxnSp>
-      <p:sp>
-        <p:nvSpPr>
-          <p:cNvPr id="87" name="TextBox 86">
-            <a:extLst>
-              <a:ext uri="{FF2B5EF4-FFF2-40B4-BE49-F238E27FC236}">
-                <a16:creationId xmlns:a16="http://schemas.microsoft.com/office/drawing/2014/main" id="{198BB0C7-B01F-4587-2862-F2936F34C8BE}"/>
-              </a:ext>
-            </a:extLst>
-          </p:cNvPr>
-          <p:cNvSpPr txBox="1"/>
-          <p:nvPr/>
-        </p:nvSpPr>
-        <p:spPr>
-          <a:xfrm>
-            <a:off x="1094487" y="3832548"/>
-            <a:ext cx="1598572" cy="369332"/>
-          </a:xfrm>
-          <a:prstGeom prst="rect">
-            <a:avLst/>
-          </a:prstGeom>
-          <a:noFill/>
-        </p:spPr>
-        <p:txBody>
-          <a:bodyPr wrap="square" rtlCol="0">
-            <a:spAutoFit/>
-          </a:bodyPr>
-          <a:lstStyle/>
-          <a:p>
-            <a:r>
-              <a:rPr lang="en-CA" dirty="0"/>
-              <a:t>No Changes</a:t>
-            </a:r>
-          </a:p>
-        </p:txBody>
-      </p:sp>
       <p:cxnSp>
         <p:nvCxnSpPr>
           <p:cNvPr id="91" name="Straight Arrow Connector 90">
@@ -8429,146 +8440,6 @@
       </p:sp>
       <p:sp>
         <p:nvSpPr>
-          <p:cNvPr id="99" name="Rectangle: Rounded Corners 98">
-            <a:extLst>
-              <a:ext uri="{FF2B5EF4-FFF2-40B4-BE49-F238E27FC236}">
-                <a16:creationId xmlns:a16="http://schemas.microsoft.com/office/drawing/2014/main" id="{203DB347-2EB9-3A7B-D375-860EEDB62E2F}"/>
-              </a:ext>
-            </a:extLst>
-          </p:cNvPr>
-          <p:cNvSpPr/>
-          <p:nvPr/>
-        </p:nvSpPr>
-        <p:spPr>
-          <a:xfrm>
-            <a:off x="1958926" y="4497430"/>
-            <a:ext cx="672951" cy="451942"/>
-          </a:xfrm>
-          <a:prstGeom prst="roundRect">
-            <a:avLst/>
-          </a:prstGeom>
-          <a:ln>
-            <a:noFill/>
-          </a:ln>
-          <a:effectLst>
-            <a:outerShdw blurRad="127000" dist="38100" dir="2700000" algn="ctr">
-              <a:srgbClr val="000000">
-                <a:alpha val="45000"/>
-              </a:srgbClr>
-            </a:outerShdw>
-          </a:effectLst>
-          <a:scene3d>
-            <a:camera prst="perspectiveFront" fov="2700000">
-              <a:rot lat="20376000" lon="1938000" rev="20112001"/>
-            </a:camera>
-            <a:lightRig rig="soft" dir="t">
-              <a:rot lat="0" lon="0" rev="0"/>
-            </a:lightRig>
-          </a:scene3d>
-          <a:sp3d prstMaterial="translucentPowder">
-            <a:bevelT w="203200" h="50800" prst="softRound"/>
-          </a:sp3d>
-        </p:spPr>
-        <p:style>
-          <a:lnRef idx="2">
-            <a:schemeClr val="accent3">
-              <a:shade val="15000"/>
-            </a:schemeClr>
-          </a:lnRef>
-          <a:fillRef idx="1">
-            <a:schemeClr val="accent3"/>
-          </a:fillRef>
-          <a:effectRef idx="0">
-            <a:schemeClr val="accent3"/>
-          </a:effectRef>
-          <a:fontRef idx="minor">
-            <a:schemeClr val="lt1"/>
-          </a:fontRef>
-        </p:style>
-        <p:txBody>
-          <a:bodyPr rtlCol="0" anchor="ctr"/>
-          <a:lstStyle/>
-          <a:p>
-            <a:pPr algn="ctr"/>
-            <a:r>
-              <a:rPr lang="en-CA" dirty="0"/>
-              <a:t>EDF</a:t>
-            </a:r>
-          </a:p>
-        </p:txBody>
-      </p:sp>
-      <p:sp>
-        <p:nvSpPr>
-          <p:cNvPr id="100" name="Rectangle: Rounded Corners 99">
-            <a:extLst>
-              <a:ext uri="{FF2B5EF4-FFF2-40B4-BE49-F238E27FC236}">
-                <a16:creationId xmlns:a16="http://schemas.microsoft.com/office/drawing/2014/main" id="{8B20C21D-B3E6-BF14-0408-739109595E0E}"/>
-              </a:ext>
-            </a:extLst>
-          </p:cNvPr>
-          <p:cNvSpPr/>
-          <p:nvPr/>
-        </p:nvSpPr>
-        <p:spPr>
-          <a:xfrm>
-            <a:off x="2046792" y="2147855"/>
-            <a:ext cx="672951" cy="451942"/>
-          </a:xfrm>
-          <a:prstGeom prst="roundRect">
-            <a:avLst/>
-          </a:prstGeom>
-          <a:ln>
-            <a:noFill/>
-          </a:ln>
-          <a:effectLst>
-            <a:outerShdw blurRad="127000" dist="38100" dir="2700000" algn="ctr">
-              <a:srgbClr val="000000">
-                <a:alpha val="45000"/>
-              </a:srgbClr>
-            </a:outerShdw>
-          </a:effectLst>
-          <a:scene3d>
-            <a:camera prst="perspectiveFront" fov="2700000">
-              <a:rot lat="20376000" lon="1938000" rev="20112001"/>
-            </a:camera>
-            <a:lightRig rig="soft" dir="t">
-              <a:rot lat="0" lon="0" rev="0"/>
-            </a:lightRig>
-          </a:scene3d>
-          <a:sp3d prstMaterial="translucentPowder">
-            <a:bevelT w="203200" h="50800" prst="softRound"/>
-          </a:sp3d>
-        </p:spPr>
-        <p:style>
-          <a:lnRef idx="2">
-            <a:schemeClr val="accent3">
-              <a:shade val="15000"/>
-            </a:schemeClr>
-          </a:lnRef>
-          <a:fillRef idx="1">
-            <a:schemeClr val="accent3"/>
-          </a:fillRef>
-          <a:effectRef idx="0">
-            <a:schemeClr val="accent3"/>
-          </a:effectRef>
-          <a:fontRef idx="minor">
-            <a:schemeClr val="lt1"/>
-          </a:fontRef>
-        </p:style>
-        <p:txBody>
-          <a:bodyPr rtlCol="0" anchor="ctr"/>
-          <a:lstStyle/>
-          <a:p>
-            <a:pPr algn="ctr"/>
-            <a:r>
-              <a:rPr lang="en-CA" dirty="0"/>
-              <a:t>EDF</a:t>
-            </a:r>
-          </a:p>
-        </p:txBody>
-      </p:sp>
-      <p:sp>
-        <p:nvSpPr>
           <p:cNvPr id="102" name="Rectangle: Rounded Corners 101">
             <a:extLst>
               <a:ext uri="{FF2B5EF4-FFF2-40B4-BE49-F238E27FC236}">
@@ -8582,76 +8453,6 @@
         <p:spPr>
           <a:xfrm>
             <a:off x="4262381" y="4239356"/>
-            <a:ext cx="672951" cy="451942"/>
-          </a:xfrm>
-          <a:prstGeom prst="roundRect">
-            <a:avLst/>
-          </a:prstGeom>
-          <a:ln>
-            <a:noFill/>
-          </a:ln>
-          <a:effectLst>
-            <a:outerShdw blurRad="127000" dist="38100" dir="2700000" algn="ctr">
-              <a:srgbClr val="000000">
-                <a:alpha val="45000"/>
-              </a:srgbClr>
-            </a:outerShdw>
-          </a:effectLst>
-          <a:scene3d>
-            <a:camera prst="perspectiveFront" fov="2700000">
-              <a:rot lat="20376000" lon="1938000" rev="20112001"/>
-            </a:camera>
-            <a:lightRig rig="soft" dir="t">
-              <a:rot lat="0" lon="0" rev="0"/>
-            </a:lightRig>
-          </a:scene3d>
-          <a:sp3d prstMaterial="translucentPowder">
-            <a:bevelT w="203200" h="50800" prst="softRound"/>
-          </a:sp3d>
-        </p:spPr>
-        <p:style>
-          <a:lnRef idx="2">
-            <a:schemeClr val="accent3">
-              <a:shade val="15000"/>
-            </a:schemeClr>
-          </a:lnRef>
-          <a:fillRef idx="1">
-            <a:schemeClr val="accent3"/>
-          </a:fillRef>
-          <a:effectRef idx="0">
-            <a:schemeClr val="accent3"/>
-          </a:effectRef>
-          <a:fontRef idx="minor">
-            <a:schemeClr val="lt1"/>
-          </a:fontRef>
-        </p:style>
-        <p:txBody>
-          <a:bodyPr rtlCol="0" anchor="ctr"/>
-          <a:lstStyle/>
-          <a:p>
-            <a:pPr algn="ctr"/>
-            <a:r>
-              <a:rPr lang="en-CA" dirty="0"/>
-              <a:t>EDF</a:t>
-            </a:r>
-          </a:p>
-        </p:txBody>
-      </p:sp>
-      <p:sp>
-        <p:nvSpPr>
-          <p:cNvPr id="103" name="Rectangle: Rounded Corners 102">
-            <a:extLst>
-              <a:ext uri="{FF2B5EF4-FFF2-40B4-BE49-F238E27FC236}">
-                <a16:creationId xmlns:a16="http://schemas.microsoft.com/office/drawing/2014/main" id="{25D72024-884B-39BE-10EE-26EA60ED312F}"/>
-              </a:ext>
-            </a:extLst>
-          </p:cNvPr>
-          <p:cNvSpPr/>
-          <p:nvPr/>
-        </p:nvSpPr>
-        <p:spPr>
-          <a:xfrm>
-            <a:off x="4230175" y="2325337"/>
             <a:ext cx="672951" cy="451942"/>
           </a:xfrm>
           <a:prstGeom prst="roundRect">
